--- a/sample_slides.pptx
+++ b/sample_slides.pptx
@@ -3456,7 +3456,7 @@
         </p:spPr>
         <p:txBody>
           <a:bodyPr wrap="square">
-            <a:spAutoFit/>
+            <a:normAutofit/>
           </a:bodyPr>
           <a:lstStyle/>
           <a:p>
@@ -3662,7 +3662,7 @@
         </p:spPr>
         <p:txBody>
           <a:bodyPr wrap="square">
-            <a:spAutoFit/>
+            <a:normAutofit/>
           </a:bodyPr>
           <a:lstStyle/>
           <a:p>
@@ -3807,7 +3807,7 @@
         </p:spPr>
         <p:txBody>
           <a:bodyPr wrap="square">
-            <a:spAutoFit/>
+            <a:normAutofit/>
           </a:bodyPr>
           <a:lstStyle/>
           <a:p>
@@ -3989,7 +3989,7 @@
         </p:spPr>
         <p:txBody>
           <a:bodyPr wrap="square">
-            <a:spAutoFit/>
+            <a:normAutofit/>
           </a:bodyPr>
           <a:lstStyle/>
           <a:p>
@@ -4195,7 +4195,7 @@
         </p:spPr>
         <p:txBody>
           <a:bodyPr wrap="square">
-            <a:spAutoFit/>
+            <a:normAutofit/>
           </a:bodyPr>
           <a:lstStyle/>
           <a:p>

--- a/sample_slides.pptx
+++ b/sample_slides.pptx
@@ -3653,7 +3653,7 @@
         <p:spPr>
           <a:xfrm>
             <a:off x="731520" y="1371600"/>
-            <a:ext cx="10698480" cy="4206240"/>
+            <a:ext cx="10698480" cy="1534160"/>
           </a:xfrm>
           <a:prstGeom prst="rect">
             <a:avLst/>
@@ -3711,7 +3711,7 @@
         </p:nvSpPr>
         <p:spPr>
           <a:xfrm>
-            <a:off x="731520" y="5486400"/>
+            <a:off x="731520" y="2905760"/>
             <a:ext cx="10698480" cy="822960"/>
           </a:xfrm>
           <a:prstGeom prst="rect">
@@ -3754,7 +3754,7 @@
         </p:nvSpPr>
         <p:spPr>
           <a:xfrm>
-            <a:off x="731520" y="5486400"/>
+            <a:off x="731520" y="2905760"/>
             <a:ext cx="54864" cy="822960"/>
           </a:xfrm>
           <a:prstGeom prst="rect">
@@ -3797,7 +3797,7 @@
         </p:nvSpPr>
         <p:spPr>
           <a:xfrm>
-            <a:off x="960120" y="5559552"/>
+            <a:off x="960120" y="2978912"/>
             <a:ext cx="10332720" cy="676656"/>
           </a:xfrm>
           <a:prstGeom prst="rect">
@@ -3980,7 +3980,7 @@
         <p:spPr>
           <a:xfrm>
             <a:off x="731520" y="1371600"/>
-            <a:ext cx="10698480" cy="4206240"/>
+            <a:ext cx="10698480" cy="1184910"/>
           </a:xfrm>
           <a:prstGeom prst="rect">
             <a:avLst/>
